--- a/Martes-09/S01_Martes-09_3_Reel_Tramites-postergados_9x16.pptx
+++ b/Martes-09/S01_Martes-09_3_Reel_Tramites-postergados_9x16.pptx
@@ -3780,7 +3780,7 @@
         </p:nvSpPr>
         <p:spPr>
           <a:xfrm>
-            <a:off x="777240" y="4155186"/>
+            <a:off x="777240" y="4282186"/>
             <a:ext cx="1371600" cy="146304"/>
           </a:xfrm>
           <a:prstGeom prst="rect">
@@ -3824,8 +3824,8 @@
         </p:nvSpPr>
         <p:spPr>
           <a:xfrm>
-            <a:off x="777240" y="4612386"/>
-            <a:ext cx="6675120" cy="4674108"/>
+            <a:off x="777240" y="4739386"/>
+            <a:ext cx="6675120" cy="4420108"/>
           </a:xfrm>
           <a:prstGeom prst="rect">
             <a:avLst/>
@@ -3844,13 +3844,13 @@
               </a:lnSpc>
             </a:pPr>
             <a:r>
-              <a:rPr sz="9200" b="1">
+              <a:rPr sz="6500" b="1">
                 <a:solidFill>
                   <a:srgbClr val="FFFFFF"/>
                 </a:solidFill>
                 <a:latin typeface="Inter"/>
               </a:rPr>
-              <a:t>¿Cuál te falta?</a:t>
+              <a:t>Resuélvelos en notaly.com.ve</a:t>
             </a:r>
           </a:p>
         </p:txBody>
@@ -3863,7 +3863,7 @@
         </p:nvSpPr>
         <p:spPr>
           <a:xfrm>
-            <a:off x="777240" y="9286494"/>
+            <a:off x="777240" y="9159494"/>
             <a:ext cx="6675120" cy="1118108"/>
           </a:xfrm>
           <a:prstGeom prst="rect">
@@ -3889,7 +3889,7 @@
                 </a:solidFill>
                 <a:latin typeface="Inter"/>
               </a:rPr>
-              <a:t>Comenta.</a:t>
+              <a:t>Early access abierto.</a:t>
             </a:r>
           </a:p>
         </p:txBody>

--- a/Martes-09/S01_Martes-09_3_Reel_Tramites-postergados_9x16.pptx
+++ b/Martes-09/S01_Martes-09_3_Reel_Tramites-postergados_9x16.pptx
@@ -3889,7 +3889,7 @@
                 </a:solidFill>
                 <a:latin typeface="Inter"/>
               </a:rPr>
-              <a:t>Early access abierto.</a:t>
+              <a:t>Conócenos.</a:t>
             </a:r>
           </a:p>
         </p:txBody>

--- a/Martes-09/S01_Martes-09_3_Reel_Tramites-postergados_9x16.pptx
+++ b/Martes-09/S01_Martes-09_3_Reel_Tramites-postergados_9x16.pptx
@@ -3102,7 +3102,7 @@
       <p:grpSpPr/>
       <p:pic>
         <p:nvPicPr>
-          <p:cNvPr id="2" name="Picture 1" descr="oficina.png"/>
+          <p:cNvPr id="2" name="Picture 1" descr="familia.png"/>
           <p:cNvPicPr>
             <a:picLocks noChangeAspect="1"/>
           </p:cNvPicPr>
@@ -3116,8 +3116,8 @@
         </p:blipFill>
         <p:spPr>
           <a:xfrm>
-            <a:off x="-1371600" y="0"/>
-            <a:ext cx="10972800" cy="14630400"/>
+            <a:off x="0" y="-57150"/>
+            <a:ext cx="8229600" cy="14744700"/>
           </a:xfrm>
           <a:prstGeom prst="rect">
             <a:avLst/>
